--- a/slides/pptx/week16.pptx
+++ b/slides/pptx/week16.pptx
@@ -1480,7 +1480,7 @@
     <p:bg>
       <p:bgPr>
         <a:solidFill>
-          <a:srgbClr val="0E1726"/>
+          <a:srgbClr val="FFFFFF"/>
         </a:solidFill>
       </p:bgPr>
     </p:bg>
@@ -1498,38 +1498,9 @@
           <a:chExt cx="0" cy="0"/>
         </a:xfrm>
       </p:grpSpPr>
-      <p:sp>
-        <p:nvSpPr>
-          <p:cNvPr id="2" name="Shape 0"/>
-          <p:cNvSpPr/>
-          <p:nvPr/>
-        </p:nvSpPr>
-        <p:spPr>
-          <a:xfrm>
-            <a:off x="603504" y="411480"/>
-            <a:ext cx="1874520" cy="932688"/>
-          </a:xfrm>
-          <a:prstGeom prst="roundRect">
-            <a:avLst>
-              <a:gd name="adj" fmla="val 7843"/>
-            </a:avLst>
-          </a:prstGeom>
-          <a:solidFill>
-            <a:srgbClr val="FFFFFF"/>
-          </a:solidFill>
-          <a:ln/>
-          <a:effectLst>
-            <a:outerShdw sx="100000" sy="100000" kx="0" ky="0" algn="bl" rotWithShape="0" blurRad="101600" dist="38100" dir="5400000">
-              <a:srgbClr val="000000">
-                <a:alpha val="35000"/>
-              </a:srgbClr>
-            </a:outerShdw>
-          </a:effectLst>
-        </p:spPr>
-      </p:sp>
       <p:pic>
         <p:nvPicPr>
-          <p:cNvPr id="3" name="Image 0" descr="/Users/pop7/Library/CloudStorage/OneDrive-MonsterConnectCo.,Ltd/Lecture/KOSEN69 - software-security/slides/pptx/assets/logo-small.png">    </p:cNvPr>
+          <p:cNvPr id="2" name="Image 0" descr="/Users/pop7/Library/CloudStorage/OneDrive-MonsterConnectCo.,Ltd/Lecture/KOSEN69 - software-security/slides/pptx/assets/logo-small.png">    </p:cNvPr>
           <p:cNvPicPr>
             <a:picLocks noChangeAspect="1"/>
           </p:cNvPicPr>
@@ -1543,8 +1514,8 @@
         </p:blipFill>
         <p:spPr>
           <a:xfrm>
-            <a:off x="758952" y="566928"/>
-            <a:ext cx="1563624" cy="621792"/>
+            <a:off x="640080" y="502920"/>
+            <a:ext cx="1691640" cy="676656"/>
           </a:xfrm>
           <a:prstGeom prst="rect">
             <a:avLst/>
@@ -1553,7 +1524,7 @@
       </p:pic>
       <p:sp>
         <p:nvSpPr>
-          <p:cNvPr id="4" name="Text 1"/>
+          <p:cNvPr id="3" name="Text 0"/>
           <p:cNvSpPr/>
           <p:nvPr/>
         </p:nvSpPr>
@@ -1592,7 +1563,7 @@
       </p:sp>
       <p:sp>
         <p:nvSpPr>
-          <p:cNvPr id="5" name="Text 2"/>
+          <p:cNvPr id="4" name="Text 1"/>
           <p:cNvSpPr/>
           <p:nvPr/>
         </p:nvSpPr>
@@ -1620,7 +1591,7 @@
             <a:r>
               <a:rPr lang="en-US" sz="4000" b="1" dirty="0">
                 <a:solidFill>
-                  <a:srgbClr val="E6EDF3"/>
+                  <a:srgbClr val="1F2937"/>
                 </a:solidFill>
                 <a:latin typeface="Arial" pitchFamily="34" charset="0"/>
                 <a:ea typeface="Arial" pitchFamily="34" charset="-122"/>
@@ -1634,7 +1605,7 @@
       </p:sp>
       <p:sp>
         <p:nvSpPr>
-          <p:cNvPr id="6" name="Text 3"/>
+          <p:cNvPr id="5" name="Text 2"/>
           <p:cNvSpPr/>
           <p:nvPr/>
         </p:nvSpPr>
@@ -1659,7 +1630,7 @@
             <a:r>
               <a:rPr lang="en-US" sz="1400" dirty="0">
                 <a:solidFill>
-                  <a:srgbClr val="94A3B8"/>
+                  <a:srgbClr val="64748B"/>
                 </a:solidFill>
                 <a:latin typeface="Calibri" pitchFamily="34" charset="0"/>
                 <a:ea typeface="Calibri" pitchFamily="34" charset="-122"/>
@@ -1685,7 +1656,7 @@
     <p:bg>
       <p:bgPr>
         <a:solidFill>
-          <a:srgbClr val="0E1726"/>
+          <a:srgbClr val="FFFFFF"/>
         </a:solidFill>
       </p:bgPr>
     </p:bg>
@@ -1722,9 +1693,9 @@
           </a:solidFill>
           <a:ln/>
           <a:effectLst>
-            <a:outerShdw sx="100000" sy="100000" kx="0" ky="0" algn="bl" rotWithShape="0" blurRad="101600" dist="38100" dir="5400000">
+            <a:outerShdw sx="100000" sy="100000" kx="0" ky="0" algn="bl" rotWithShape="0" blurRad="76200" dist="25400" dir="5400000">
               <a:srgbClr val="000000">
-                <a:alpha val="35000"/>
+                <a:alpha val="12000"/>
               </a:srgbClr>
             </a:outerShdw>
           </a:effectLst>
@@ -1781,7 +1752,7 @@
             <a:r>
               <a:rPr lang="en-US" sz="2600" b="1" dirty="0">
                 <a:solidFill>
-                  <a:srgbClr val="E6EDF3"/>
+                  <a:srgbClr val="1F2937"/>
                 </a:solidFill>
                 <a:latin typeface="Arial" pitchFamily="34" charset="0"/>
                 <a:ea typeface="Arial" pitchFamily="34" charset="-122"/>
@@ -1810,13 +1781,13 @@
             </a:avLst>
           </a:prstGeom>
           <a:solidFill>
-            <a:srgbClr val="18243A"/>
+            <a:srgbClr val="F1F5F9"/>
           </a:solidFill>
           <a:ln/>
           <a:effectLst>
-            <a:outerShdw sx="100000" sy="100000" kx="0" ky="0" algn="bl" rotWithShape="0" blurRad="101600" dist="38100" dir="5400000">
+            <a:outerShdw sx="100000" sy="100000" kx="0" ky="0" algn="bl" rotWithShape="0" blurRad="76200" dist="25400" dir="5400000">
               <a:srgbClr val="000000">
-                <a:alpha val="35000"/>
+                <a:alpha val="12000"/>
               </a:srgbClr>
             </a:outerShdw>
           </a:effectLst>
@@ -1853,7 +1824,7 @@
             <a:r>
               <a:rPr lang="en-US" sz="1400" dirty="0">
                 <a:solidFill>
-                  <a:srgbClr val="E6EDF3"/>
+                  <a:srgbClr val="1F2937"/>
                 </a:solidFill>
                 <a:latin typeface="Calibri" pitchFamily="34" charset="0"/>
                 <a:ea typeface="Calibri" pitchFamily="34" charset="-122"/>
@@ -1874,7 +1845,7 @@
             <a:r>
               <a:rPr lang="en-US" sz="1400" dirty="0">
                 <a:solidFill>
-                  <a:srgbClr val="E6EDF3"/>
+                  <a:srgbClr val="1F2937"/>
                 </a:solidFill>
                 <a:latin typeface="Calibri" pitchFamily="34" charset="0"/>
                 <a:ea typeface="Calibri" pitchFamily="34" charset="-122"/>
@@ -1895,7 +1866,7 @@
             <a:r>
               <a:rPr lang="en-US" sz="1400" dirty="0">
                 <a:solidFill>
-                  <a:srgbClr val="E6EDF3"/>
+                  <a:srgbClr val="1F2937"/>
                 </a:solidFill>
                 <a:latin typeface="Calibri" pitchFamily="34" charset="0"/>
                 <a:ea typeface="Calibri" pitchFamily="34" charset="-122"/>
@@ -1934,7 +1905,7 @@
             <a:r>
               <a:rPr lang="en-US" sz="900" dirty="0">
                 <a:solidFill>
-                  <a:srgbClr val="94A3B8"/>
+                  <a:srgbClr val="64748B"/>
                 </a:solidFill>
                 <a:latin typeface="Calibri" pitchFamily="34" charset="0"/>
                 <a:ea typeface="Calibri" pitchFamily="34" charset="-122"/>
@@ -1946,38 +1917,9 @@
           </a:p>
         </p:txBody>
       </p:sp>
-      <p:sp>
-        <p:nvSpPr>
-          <p:cNvPr id="8" name="Shape 5"/>
-          <p:cNvSpPr/>
-          <p:nvPr/>
-        </p:nvSpPr>
-        <p:spPr>
-          <a:xfrm>
-            <a:off x="7772400" y="4590288"/>
-            <a:ext cx="969264" cy="475488"/>
-          </a:xfrm>
-          <a:prstGeom prst="roundRect">
-            <a:avLst>
-              <a:gd name="adj" fmla="val 11538"/>
-            </a:avLst>
-          </a:prstGeom>
-          <a:solidFill>
-            <a:srgbClr val="FFFFFF"/>
-          </a:solidFill>
-          <a:ln/>
-          <a:effectLst>
-            <a:outerShdw sx="100000" sy="100000" kx="0" ky="0" algn="bl" rotWithShape="0" blurRad="101600" dist="38100" dir="5400000">
-              <a:srgbClr val="000000">
-                <a:alpha val="35000"/>
-              </a:srgbClr>
-            </a:outerShdw>
-          </a:effectLst>
-        </p:spPr>
-      </p:sp>
       <p:pic>
         <p:nvPicPr>
-          <p:cNvPr id="9" name="Image 1" descr="/Users/pop7/Library/CloudStorage/OneDrive-MonsterConnectCo.,Ltd/Lecture/KOSEN69 - software-security/slides/pptx/assets/logo-small.png">    </p:cNvPr>
+          <p:cNvPr id="8" name="Image 1" descr="/Users/pop7/Library/CloudStorage/OneDrive-MonsterConnectCo.,Ltd/Lecture/KOSEN69 - software-security/slides/pptx/assets/logo-small.png">    </p:cNvPr>
           <p:cNvPicPr>
             <a:picLocks noChangeAspect="1"/>
           </p:cNvPicPr>
@@ -1991,7 +1933,7 @@
         </p:blipFill>
         <p:spPr>
           <a:xfrm>
-            <a:off x="7872984" y="4681728"/>
+            <a:off x="7882128" y="4700016"/>
             <a:ext cx="768096" cy="356616"/>
           </a:xfrm>
           <a:prstGeom prst="rect">
@@ -2013,7 +1955,7 @@
     <p:bg>
       <p:bgPr>
         <a:solidFill>
-          <a:srgbClr val="0E1726"/>
+          <a:srgbClr val="FFFFFF"/>
         </a:solidFill>
       </p:bgPr>
     </p:bg>
@@ -2050,9 +1992,9 @@
           </a:solidFill>
           <a:ln/>
           <a:effectLst>
-            <a:outerShdw sx="100000" sy="100000" kx="0" ky="0" algn="bl" rotWithShape="0" blurRad="101600" dist="38100" dir="5400000">
+            <a:outerShdw sx="100000" sy="100000" kx="0" ky="0" algn="bl" rotWithShape="0" blurRad="76200" dist="25400" dir="5400000">
               <a:srgbClr val="000000">
-                <a:alpha val="35000"/>
+                <a:alpha val="12000"/>
               </a:srgbClr>
             </a:outerShdw>
           </a:effectLst>
@@ -2109,7 +2051,7 @@
             <a:r>
               <a:rPr lang="en-US" sz="2600" b="1" dirty="0">
                 <a:solidFill>
-                  <a:srgbClr val="E6EDF3"/>
+                  <a:srgbClr val="1F2937"/>
                 </a:solidFill>
                 <a:latin typeface="Arial" pitchFamily="34" charset="0"/>
                 <a:ea typeface="Arial" pitchFamily="34" charset="-122"/>
@@ -2138,13 +2080,13 @@
             </a:avLst>
           </a:prstGeom>
           <a:solidFill>
-            <a:srgbClr val="18243A"/>
+            <a:srgbClr val="F1F5F9"/>
           </a:solidFill>
           <a:ln/>
           <a:effectLst>
-            <a:outerShdw sx="100000" sy="100000" kx="0" ky="0" algn="bl" rotWithShape="0" blurRad="101600" dist="38100" dir="5400000">
+            <a:outerShdw sx="100000" sy="100000" kx="0" ky="0" algn="bl" rotWithShape="0" blurRad="76200" dist="25400" dir="5400000">
               <a:srgbClr val="000000">
-                <a:alpha val="35000"/>
+                <a:alpha val="12000"/>
               </a:srgbClr>
             </a:outerShdw>
           </a:effectLst>
@@ -2181,7 +2123,7 @@
             <a:r>
               <a:rPr lang="en-US" sz="1400" dirty="0">
                 <a:solidFill>
-                  <a:srgbClr val="E6EDF3"/>
+                  <a:srgbClr val="1F2937"/>
                 </a:solidFill>
                 <a:latin typeface="Calibri" pitchFamily="34" charset="0"/>
                 <a:ea typeface="Calibri" pitchFamily="34" charset="-122"/>
@@ -2202,7 +2144,7 @@
             <a:r>
               <a:rPr lang="en-US" sz="1400" dirty="0">
                 <a:solidFill>
-                  <a:srgbClr val="E6EDF3"/>
+                  <a:srgbClr val="1F2937"/>
                 </a:solidFill>
                 <a:latin typeface="Calibri" pitchFamily="34" charset="0"/>
                 <a:ea typeface="Calibri" pitchFamily="34" charset="-122"/>
@@ -2223,7 +2165,7 @@
             <a:r>
               <a:rPr lang="en-US" sz="1400" dirty="0">
                 <a:solidFill>
-                  <a:srgbClr val="E6EDF3"/>
+                  <a:srgbClr val="1F2937"/>
                 </a:solidFill>
                 <a:latin typeface="Calibri" pitchFamily="34" charset="0"/>
                 <a:ea typeface="Calibri" pitchFamily="34" charset="-122"/>
@@ -2244,7 +2186,7 @@
             <a:r>
               <a:rPr lang="en-US" sz="1400" dirty="0">
                 <a:solidFill>
-                  <a:srgbClr val="E6EDF3"/>
+                  <a:srgbClr val="1F2937"/>
                 </a:solidFill>
                 <a:latin typeface="Calibri" pitchFamily="34" charset="0"/>
                 <a:ea typeface="Calibri" pitchFamily="34" charset="-122"/>
@@ -2283,7 +2225,7 @@
             <a:r>
               <a:rPr lang="en-US" sz="900" dirty="0">
                 <a:solidFill>
-                  <a:srgbClr val="94A3B8"/>
+                  <a:srgbClr val="64748B"/>
                 </a:solidFill>
                 <a:latin typeface="Calibri" pitchFamily="34" charset="0"/>
                 <a:ea typeface="Calibri" pitchFamily="34" charset="-122"/>
@@ -2295,38 +2237,9 @@
           </a:p>
         </p:txBody>
       </p:sp>
-      <p:sp>
-        <p:nvSpPr>
-          <p:cNvPr id="8" name="Shape 5"/>
-          <p:cNvSpPr/>
-          <p:nvPr/>
-        </p:nvSpPr>
-        <p:spPr>
-          <a:xfrm>
-            <a:off x="7772400" y="4590288"/>
-            <a:ext cx="969264" cy="475488"/>
-          </a:xfrm>
-          <a:prstGeom prst="roundRect">
-            <a:avLst>
-              <a:gd name="adj" fmla="val 11538"/>
-            </a:avLst>
-          </a:prstGeom>
-          <a:solidFill>
-            <a:srgbClr val="FFFFFF"/>
-          </a:solidFill>
-          <a:ln/>
-          <a:effectLst>
-            <a:outerShdw sx="100000" sy="100000" kx="0" ky="0" algn="bl" rotWithShape="0" blurRad="101600" dist="38100" dir="5400000">
-              <a:srgbClr val="000000">
-                <a:alpha val="35000"/>
-              </a:srgbClr>
-            </a:outerShdw>
-          </a:effectLst>
-        </p:spPr>
-      </p:sp>
       <p:pic>
         <p:nvPicPr>
-          <p:cNvPr id="9" name="Image 1" descr="/Users/pop7/Library/CloudStorage/OneDrive-MonsterConnectCo.,Ltd/Lecture/KOSEN69 - software-security/slides/pptx/assets/logo-small.png">    </p:cNvPr>
+          <p:cNvPr id="8" name="Image 1" descr="/Users/pop7/Library/CloudStorage/OneDrive-MonsterConnectCo.,Ltd/Lecture/KOSEN69 - software-security/slides/pptx/assets/logo-small.png">    </p:cNvPr>
           <p:cNvPicPr>
             <a:picLocks noChangeAspect="1"/>
           </p:cNvPicPr>
@@ -2340,7 +2253,7 @@
         </p:blipFill>
         <p:spPr>
           <a:xfrm>
-            <a:off x="7872984" y="4681728"/>
+            <a:off x="7882128" y="4700016"/>
             <a:ext cx="768096" cy="356616"/>
           </a:xfrm>
           <a:prstGeom prst="rect">
@@ -2362,7 +2275,7 @@
     <p:bg>
       <p:bgPr>
         <a:solidFill>
-          <a:srgbClr val="0E1726"/>
+          <a:srgbClr val="FFFFFF"/>
         </a:solidFill>
       </p:bgPr>
     </p:bg>
@@ -2399,9 +2312,9 @@
           </a:solidFill>
           <a:ln/>
           <a:effectLst>
-            <a:outerShdw sx="100000" sy="100000" kx="0" ky="0" algn="bl" rotWithShape="0" blurRad="101600" dist="38100" dir="5400000">
+            <a:outerShdw sx="100000" sy="100000" kx="0" ky="0" algn="bl" rotWithShape="0" blurRad="76200" dist="25400" dir="5400000">
               <a:srgbClr val="000000">
-                <a:alpha val="35000"/>
+                <a:alpha val="12000"/>
               </a:srgbClr>
             </a:outerShdw>
           </a:effectLst>
@@ -2458,7 +2371,7 @@
             <a:r>
               <a:rPr lang="en-US" sz="2600" b="1" dirty="0">
                 <a:solidFill>
-                  <a:srgbClr val="E6EDF3"/>
+                  <a:srgbClr val="1F2937"/>
                 </a:solidFill>
                 <a:latin typeface="Arial" pitchFamily="34" charset="0"/>
                 <a:ea typeface="Arial" pitchFamily="34" charset="-122"/>
@@ -2487,13 +2400,13 @@
             </a:avLst>
           </a:prstGeom>
           <a:solidFill>
-            <a:srgbClr val="18243A"/>
+            <a:srgbClr val="F1F5F9"/>
           </a:solidFill>
           <a:ln/>
           <a:effectLst>
-            <a:outerShdw sx="100000" sy="100000" kx="0" ky="0" algn="bl" rotWithShape="0" blurRad="101600" dist="38100" dir="5400000">
+            <a:outerShdw sx="100000" sy="100000" kx="0" ky="0" algn="bl" rotWithShape="0" blurRad="76200" dist="25400" dir="5400000">
               <a:srgbClr val="000000">
-                <a:alpha val="35000"/>
+                <a:alpha val="12000"/>
               </a:srgbClr>
             </a:outerShdw>
           </a:effectLst>
@@ -2530,7 +2443,7 @@
             <a:r>
               <a:rPr lang="en-US" sz="1400" dirty="0">
                 <a:solidFill>
-                  <a:srgbClr val="E6EDF3"/>
+                  <a:srgbClr val="1F2937"/>
                 </a:solidFill>
                 <a:latin typeface="Calibri" pitchFamily="34" charset="0"/>
                 <a:ea typeface="Calibri" pitchFamily="34" charset="-122"/>
@@ -2551,7 +2464,7 @@
             <a:r>
               <a:rPr lang="en-US" sz="1400" dirty="0">
                 <a:solidFill>
-                  <a:srgbClr val="E6EDF3"/>
+                  <a:srgbClr val="1F2937"/>
                 </a:solidFill>
                 <a:latin typeface="Calibri" pitchFamily="34" charset="0"/>
                 <a:ea typeface="Calibri" pitchFamily="34" charset="-122"/>
@@ -2572,7 +2485,7 @@
             <a:r>
               <a:rPr lang="en-US" sz="1400" dirty="0">
                 <a:solidFill>
-                  <a:srgbClr val="E6EDF3"/>
+                  <a:srgbClr val="1F2937"/>
                 </a:solidFill>
                 <a:latin typeface="Calibri" pitchFamily="34" charset="0"/>
                 <a:ea typeface="Calibri" pitchFamily="34" charset="-122"/>
@@ -2611,7 +2524,7 @@
             <a:r>
               <a:rPr lang="en-US" sz="900" dirty="0">
                 <a:solidFill>
-                  <a:srgbClr val="94A3B8"/>
+                  <a:srgbClr val="64748B"/>
                 </a:solidFill>
                 <a:latin typeface="Calibri" pitchFamily="34" charset="0"/>
                 <a:ea typeface="Calibri" pitchFamily="34" charset="-122"/>
@@ -2623,38 +2536,9 @@
           </a:p>
         </p:txBody>
       </p:sp>
-      <p:sp>
-        <p:nvSpPr>
-          <p:cNvPr id="8" name="Shape 5"/>
-          <p:cNvSpPr/>
-          <p:nvPr/>
-        </p:nvSpPr>
-        <p:spPr>
-          <a:xfrm>
-            <a:off x="7772400" y="4590288"/>
-            <a:ext cx="969264" cy="475488"/>
-          </a:xfrm>
-          <a:prstGeom prst="roundRect">
-            <a:avLst>
-              <a:gd name="adj" fmla="val 11538"/>
-            </a:avLst>
-          </a:prstGeom>
-          <a:solidFill>
-            <a:srgbClr val="FFFFFF"/>
-          </a:solidFill>
-          <a:ln/>
-          <a:effectLst>
-            <a:outerShdw sx="100000" sy="100000" kx="0" ky="0" algn="bl" rotWithShape="0" blurRad="101600" dist="38100" dir="5400000">
-              <a:srgbClr val="000000">
-                <a:alpha val="35000"/>
-              </a:srgbClr>
-            </a:outerShdw>
-          </a:effectLst>
-        </p:spPr>
-      </p:sp>
       <p:pic>
         <p:nvPicPr>
-          <p:cNvPr id="9" name="Image 1" descr="/Users/pop7/Library/CloudStorage/OneDrive-MonsterConnectCo.,Ltd/Lecture/KOSEN69 - software-security/slides/pptx/assets/logo-small.png">    </p:cNvPr>
+          <p:cNvPr id="8" name="Image 1" descr="/Users/pop7/Library/CloudStorage/OneDrive-MonsterConnectCo.,Ltd/Lecture/KOSEN69 - software-security/slides/pptx/assets/logo-small.png">    </p:cNvPr>
           <p:cNvPicPr>
             <a:picLocks noChangeAspect="1"/>
           </p:cNvPicPr>
@@ -2668,7 +2552,7 @@
         </p:blipFill>
         <p:spPr>
           <a:xfrm>
-            <a:off x="7872984" y="4681728"/>
+            <a:off x="7882128" y="4700016"/>
             <a:ext cx="768096" cy="356616"/>
           </a:xfrm>
           <a:prstGeom prst="rect">
@@ -2690,7 +2574,7 @@
     <p:bg>
       <p:bgPr>
         <a:solidFill>
-          <a:srgbClr val="0E1726"/>
+          <a:srgbClr val="FFFFFF"/>
         </a:solidFill>
       </p:bgPr>
     </p:bg>
@@ -2727,9 +2611,9 @@
           </a:solidFill>
           <a:ln/>
           <a:effectLst>
-            <a:outerShdw sx="100000" sy="100000" kx="0" ky="0" algn="bl" rotWithShape="0" blurRad="101600" dist="38100" dir="5400000">
+            <a:outerShdw sx="100000" sy="100000" kx="0" ky="0" algn="bl" rotWithShape="0" blurRad="76200" dist="25400" dir="5400000">
               <a:srgbClr val="000000">
-                <a:alpha val="35000"/>
+                <a:alpha val="12000"/>
               </a:srgbClr>
             </a:outerShdw>
           </a:effectLst>
@@ -2786,7 +2670,7 @@
             <a:r>
               <a:rPr lang="en-US" sz="2600" b="1" dirty="0">
                 <a:solidFill>
-                  <a:srgbClr val="E6EDF3"/>
+                  <a:srgbClr val="1F2937"/>
                 </a:solidFill>
                 <a:latin typeface="Arial" pitchFamily="34" charset="0"/>
                 <a:ea typeface="Arial" pitchFamily="34" charset="-122"/>
@@ -2815,13 +2699,13 @@
             </a:avLst>
           </a:prstGeom>
           <a:solidFill>
-            <a:srgbClr val="18243A"/>
+            <a:srgbClr val="F1F5F9"/>
           </a:solidFill>
           <a:ln/>
           <a:effectLst>
-            <a:outerShdw sx="100000" sy="100000" kx="0" ky="0" algn="bl" rotWithShape="0" blurRad="101600" dist="38100" dir="5400000">
+            <a:outerShdw sx="100000" sy="100000" kx="0" ky="0" algn="bl" rotWithShape="0" blurRad="76200" dist="25400" dir="5400000">
               <a:srgbClr val="000000">
-                <a:alpha val="35000"/>
+                <a:alpha val="12000"/>
               </a:srgbClr>
             </a:outerShdw>
           </a:effectLst>
@@ -2858,7 +2742,7 @@
             <a:r>
               <a:rPr lang="en-US" sz="1400" dirty="0">
                 <a:solidFill>
-                  <a:srgbClr val="E6EDF3"/>
+                  <a:srgbClr val="1F2937"/>
                 </a:solidFill>
                 <a:latin typeface="Calibri" pitchFamily="34" charset="0"/>
                 <a:ea typeface="Calibri" pitchFamily="34" charset="-122"/>
@@ -2879,7 +2763,7 @@
             <a:r>
               <a:rPr lang="en-US" sz="1400" dirty="0">
                 <a:solidFill>
-                  <a:srgbClr val="E6EDF3"/>
+                  <a:srgbClr val="1F2937"/>
                 </a:solidFill>
                 <a:latin typeface="Calibri" pitchFamily="34" charset="0"/>
                 <a:ea typeface="Calibri" pitchFamily="34" charset="-122"/>
@@ -2900,7 +2784,7 @@
             <a:r>
               <a:rPr lang="en-US" sz="1400" dirty="0">
                 <a:solidFill>
-                  <a:srgbClr val="E6EDF3"/>
+                  <a:srgbClr val="1F2937"/>
                 </a:solidFill>
                 <a:latin typeface="Calibri" pitchFamily="34" charset="0"/>
                 <a:ea typeface="Calibri" pitchFamily="34" charset="-122"/>
@@ -2921,7 +2805,7 @@
             <a:r>
               <a:rPr lang="en-US" sz="1400" dirty="0">
                 <a:solidFill>
-                  <a:srgbClr val="E6EDF3"/>
+                  <a:srgbClr val="1F2937"/>
                 </a:solidFill>
                 <a:latin typeface="Calibri" pitchFamily="34" charset="0"/>
                 <a:ea typeface="Calibri" pitchFamily="34" charset="-122"/>
@@ -2960,7 +2844,7 @@
             <a:r>
               <a:rPr lang="en-US" sz="900" dirty="0">
                 <a:solidFill>
-                  <a:srgbClr val="94A3B8"/>
+                  <a:srgbClr val="64748B"/>
                 </a:solidFill>
                 <a:latin typeface="Calibri" pitchFamily="34" charset="0"/>
                 <a:ea typeface="Calibri" pitchFamily="34" charset="-122"/>
@@ -2972,38 +2856,9 @@
           </a:p>
         </p:txBody>
       </p:sp>
-      <p:sp>
-        <p:nvSpPr>
-          <p:cNvPr id="8" name="Shape 5"/>
-          <p:cNvSpPr/>
-          <p:nvPr/>
-        </p:nvSpPr>
-        <p:spPr>
-          <a:xfrm>
-            <a:off x="7772400" y="4590288"/>
-            <a:ext cx="969264" cy="475488"/>
-          </a:xfrm>
-          <a:prstGeom prst="roundRect">
-            <a:avLst>
-              <a:gd name="adj" fmla="val 11538"/>
-            </a:avLst>
-          </a:prstGeom>
-          <a:solidFill>
-            <a:srgbClr val="FFFFFF"/>
-          </a:solidFill>
-          <a:ln/>
-          <a:effectLst>
-            <a:outerShdw sx="100000" sy="100000" kx="0" ky="0" algn="bl" rotWithShape="0" blurRad="101600" dist="38100" dir="5400000">
-              <a:srgbClr val="000000">
-                <a:alpha val="35000"/>
-              </a:srgbClr>
-            </a:outerShdw>
-          </a:effectLst>
-        </p:spPr>
-      </p:sp>
       <p:pic>
         <p:nvPicPr>
-          <p:cNvPr id="9" name="Image 1" descr="/Users/pop7/Library/CloudStorage/OneDrive-MonsterConnectCo.,Ltd/Lecture/KOSEN69 - software-security/slides/pptx/assets/logo-small.png">    </p:cNvPr>
+          <p:cNvPr id="8" name="Image 1" descr="/Users/pop7/Library/CloudStorage/OneDrive-MonsterConnectCo.,Ltd/Lecture/KOSEN69 - software-security/slides/pptx/assets/logo-small.png">    </p:cNvPr>
           <p:cNvPicPr>
             <a:picLocks noChangeAspect="1"/>
           </p:cNvPicPr>
@@ -3017,7 +2872,7 @@
         </p:blipFill>
         <p:spPr>
           <a:xfrm>
-            <a:off x="7872984" y="4681728"/>
+            <a:off x="7882128" y="4700016"/>
             <a:ext cx="768096" cy="356616"/>
           </a:xfrm>
           <a:prstGeom prst="rect">
@@ -3039,7 +2894,7 @@
     <p:bg>
       <p:bgPr>
         <a:solidFill>
-          <a:srgbClr val="0E1726"/>
+          <a:srgbClr val="FFFFFF"/>
         </a:solidFill>
       </p:bgPr>
     </p:bg>
@@ -3076,9 +2931,9 @@
           </a:solidFill>
           <a:ln/>
           <a:effectLst>
-            <a:outerShdw sx="100000" sy="100000" kx="0" ky="0" algn="bl" rotWithShape="0" blurRad="101600" dist="38100" dir="5400000">
+            <a:outerShdw sx="100000" sy="100000" kx="0" ky="0" algn="bl" rotWithShape="0" blurRad="76200" dist="25400" dir="5400000">
               <a:srgbClr val="000000">
-                <a:alpha val="35000"/>
+                <a:alpha val="12000"/>
               </a:srgbClr>
             </a:outerShdw>
           </a:effectLst>
@@ -3135,7 +2990,7 @@
             <a:r>
               <a:rPr lang="en-US" sz="2600" b="1" dirty="0">
                 <a:solidFill>
-                  <a:srgbClr val="E6EDF3"/>
+                  <a:srgbClr val="1F2937"/>
                 </a:solidFill>
                 <a:latin typeface="Arial" pitchFamily="34" charset="0"/>
                 <a:ea typeface="Arial" pitchFamily="34" charset="-122"/>
@@ -3164,13 +3019,13 @@
             </a:avLst>
           </a:prstGeom>
           <a:solidFill>
-            <a:srgbClr val="18243A"/>
+            <a:srgbClr val="F1F5F9"/>
           </a:solidFill>
           <a:ln/>
           <a:effectLst>
-            <a:outerShdw sx="100000" sy="100000" kx="0" ky="0" algn="bl" rotWithShape="0" blurRad="101600" dist="38100" dir="5400000">
+            <a:outerShdw sx="100000" sy="100000" kx="0" ky="0" algn="bl" rotWithShape="0" blurRad="76200" dist="25400" dir="5400000">
               <a:srgbClr val="000000">
-                <a:alpha val="35000"/>
+                <a:alpha val="12000"/>
               </a:srgbClr>
             </a:outerShdw>
           </a:effectLst>
@@ -3207,7 +3062,7 @@
             <a:r>
               <a:rPr lang="en-US" sz="1400" dirty="0">
                 <a:solidFill>
-                  <a:srgbClr val="E6EDF3"/>
+                  <a:srgbClr val="1F2937"/>
                 </a:solidFill>
                 <a:latin typeface="Calibri" pitchFamily="34" charset="0"/>
                 <a:ea typeface="Calibri" pitchFamily="34" charset="-122"/>
@@ -3228,7 +3083,7 @@
             <a:r>
               <a:rPr lang="en-US" sz="1400" dirty="0">
                 <a:solidFill>
-                  <a:srgbClr val="E6EDF3"/>
+                  <a:srgbClr val="1F2937"/>
                 </a:solidFill>
                 <a:latin typeface="Calibri" pitchFamily="34" charset="0"/>
                 <a:ea typeface="Calibri" pitchFamily="34" charset="-122"/>
@@ -3249,7 +3104,7 @@
             <a:r>
               <a:rPr lang="en-US" sz="1400" dirty="0">
                 <a:solidFill>
-                  <a:srgbClr val="E6EDF3"/>
+                  <a:srgbClr val="1F2937"/>
                 </a:solidFill>
                 <a:latin typeface="Calibri" pitchFamily="34" charset="0"/>
                 <a:ea typeface="Calibri" pitchFamily="34" charset="-122"/>
@@ -3288,7 +3143,7 @@
             <a:r>
               <a:rPr lang="en-US" sz="900" dirty="0">
                 <a:solidFill>
-                  <a:srgbClr val="94A3B8"/>
+                  <a:srgbClr val="64748B"/>
                 </a:solidFill>
                 <a:latin typeface="Calibri" pitchFamily="34" charset="0"/>
                 <a:ea typeface="Calibri" pitchFamily="34" charset="-122"/>
@@ -3300,38 +3155,9 @@
           </a:p>
         </p:txBody>
       </p:sp>
-      <p:sp>
-        <p:nvSpPr>
-          <p:cNvPr id="8" name="Shape 5"/>
-          <p:cNvSpPr/>
-          <p:nvPr/>
-        </p:nvSpPr>
-        <p:spPr>
-          <a:xfrm>
-            <a:off x="7772400" y="4590288"/>
-            <a:ext cx="969264" cy="475488"/>
-          </a:xfrm>
-          <a:prstGeom prst="roundRect">
-            <a:avLst>
-              <a:gd name="adj" fmla="val 11538"/>
-            </a:avLst>
-          </a:prstGeom>
-          <a:solidFill>
-            <a:srgbClr val="FFFFFF"/>
-          </a:solidFill>
-          <a:ln/>
-          <a:effectLst>
-            <a:outerShdw sx="100000" sy="100000" kx="0" ky="0" algn="bl" rotWithShape="0" blurRad="101600" dist="38100" dir="5400000">
-              <a:srgbClr val="000000">
-                <a:alpha val="35000"/>
-              </a:srgbClr>
-            </a:outerShdw>
-          </a:effectLst>
-        </p:spPr>
-      </p:sp>
       <p:pic>
         <p:nvPicPr>
-          <p:cNvPr id="9" name="Image 1" descr="/Users/pop7/Library/CloudStorage/OneDrive-MonsterConnectCo.,Ltd/Lecture/KOSEN69 - software-security/slides/pptx/assets/logo-small.png">    </p:cNvPr>
+          <p:cNvPr id="8" name="Image 1" descr="/Users/pop7/Library/CloudStorage/OneDrive-MonsterConnectCo.,Ltd/Lecture/KOSEN69 - software-security/slides/pptx/assets/logo-small.png">    </p:cNvPr>
           <p:cNvPicPr>
             <a:picLocks noChangeAspect="1"/>
           </p:cNvPicPr>
@@ -3345,7 +3171,7 @@
         </p:blipFill>
         <p:spPr>
           <a:xfrm>
-            <a:off x="7872984" y="4681728"/>
+            <a:off x="7882128" y="4700016"/>
             <a:ext cx="768096" cy="356616"/>
           </a:xfrm>
           <a:prstGeom prst="rect">
@@ -3367,7 +3193,7 @@
     <p:bg>
       <p:bgPr>
         <a:solidFill>
-          <a:srgbClr val="0E1726"/>
+          <a:srgbClr val="FFFFFF"/>
         </a:solidFill>
       </p:bgPr>
     </p:bg>
@@ -3404,9 +3230,9 @@
           </a:solidFill>
           <a:ln/>
           <a:effectLst>
-            <a:outerShdw sx="100000" sy="100000" kx="0" ky="0" algn="bl" rotWithShape="0" blurRad="101600" dist="38100" dir="5400000">
+            <a:outerShdw sx="100000" sy="100000" kx="0" ky="0" algn="bl" rotWithShape="0" blurRad="76200" dist="25400" dir="5400000">
               <a:srgbClr val="000000">
-                <a:alpha val="35000"/>
+                <a:alpha val="12000"/>
               </a:srgbClr>
             </a:outerShdw>
           </a:effectLst>
@@ -3463,7 +3289,7 @@
             <a:r>
               <a:rPr lang="en-US" sz="2600" b="1" dirty="0">
                 <a:solidFill>
-                  <a:srgbClr val="E6EDF3"/>
+                  <a:srgbClr val="1F2937"/>
                 </a:solidFill>
                 <a:latin typeface="Arial" pitchFamily="34" charset="0"/>
                 <a:ea typeface="Arial" pitchFamily="34" charset="-122"/>
@@ -3492,13 +3318,13 @@
             </a:avLst>
           </a:prstGeom>
           <a:solidFill>
-            <a:srgbClr val="18243A"/>
+            <a:srgbClr val="F1F5F9"/>
           </a:solidFill>
           <a:ln/>
           <a:effectLst>
-            <a:outerShdw sx="100000" sy="100000" kx="0" ky="0" algn="bl" rotWithShape="0" blurRad="101600" dist="38100" dir="5400000">
+            <a:outerShdw sx="100000" sy="100000" kx="0" ky="0" algn="bl" rotWithShape="0" blurRad="76200" dist="25400" dir="5400000">
               <a:srgbClr val="000000">
-                <a:alpha val="35000"/>
+                <a:alpha val="12000"/>
               </a:srgbClr>
             </a:outerShdw>
           </a:effectLst>
@@ -3535,7 +3361,7 @@
             <a:r>
               <a:rPr lang="en-US" sz="1400" dirty="0">
                 <a:solidFill>
-                  <a:srgbClr val="E6EDF3"/>
+                  <a:srgbClr val="1F2937"/>
                 </a:solidFill>
                 <a:latin typeface="Calibri" pitchFamily="34" charset="0"/>
                 <a:ea typeface="Calibri" pitchFamily="34" charset="-122"/>
@@ -3556,7 +3382,7 @@
             <a:r>
               <a:rPr lang="en-US" sz="1400" dirty="0">
                 <a:solidFill>
-                  <a:srgbClr val="E6EDF3"/>
+                  <a:srgbClr val="1F2937"/>
                 </a:solidFill>
                 <a:latin typeface="Calibri" pitchFamily="34" charset="0"/>
                 <a:ea typeface="Calibri" pitchFamily="34" charset="-122"/>
@@ -3577,7 +3403,7 @@
             <a:r>
               <a:rPr lang="en-US" sz="1400" dirty="0">
                 <a:solidFill>
-                  <a:srgbClr val="E6EDF3"/>
+                  <a:srgbClr val="1F2937"/>
                 </a:solidFill>
                 <a:latin typeface="Calibri" pitchFamily="34" charset="0"/>
                 <a:ea typeface="Calibri" pitchFamily="34" charset="-122"/>
@@ -3616,7 +3442,7 @@
             <a:r>
               <a:rPr lang="en-US" sz="900" dirty="0">
                 <a:solidFill>
-                  <a:srgbClr val="94A3B8"/>
+                  <a:srgbClr val="64748B"/>
                 </a:solidFill>
                 <a:latin typeface="Calibri" pitchFamily="34" charset="0"/>
                 <a:ea typeface="Calibri" pitchFamily="34" charset="-122"/>
@@ -3628,38 +3454,9 @@
           </a:p>
         </p:txBody>
       </p:sp>
-      <p:sp>
-        <p:nvSpPr>
-          <p:cNvPr id="8" name="Shape 5"/>
-          <p:cNvSpPr/>
-          <p:nvPr/>
-        </p:nvSpPr>
-        <p:spPr>
-          <a:xfrm>
-            <a:off x="7772400" y="4590288"/>
-            <a:ext cx="969264" cy="475488"/>
-          </a:xfrm>
-          <a:prstGeom prst="roundRect">
-            <a:avLst>
-              <a:gd name="adj" fmla="val 11538"/>
-            </a:avLst>
-          </a:prstGeom>
-          <a:solidFill>
-            <a:srgbClr val="FFFFFF"/>
-          </a:solidFill>
-          <a:ln/>
-          <a:effectLst>
-            <a:outerShdw sx="100000" sy="100000" kx="0" ky="0" algn="bl" rotWithShape="0" blurRad="101600" dist="38100" dir="5400000">
-              <a:srgbClr val="000000">
-                <a:alpha val="35000"/>
-              </a:srgbClr>
-            </a:outerShdw>
-          </a:effectLst>
-        </p:spPr>
-      </p:sp>
       <p:pic>
         <p:nvPicPr>
-          <p:cNvPr id="9" name="Image 1" descr="/Users/pop7/Library/CloudStorage/OneDrive-MonsterConnectCo.,Ltd/Lecture/KOSEN69 - software-security/slides/pptx/assets/logo-small.png">    </p:cNvPr>
+          <p:cNvPr id="8" name="Image 1" descr="/Users/pop7/Library/CloudStorage/OneDrive-MonsterConnectCo.,Ltd/Lecture/KOSEN69 - software-security/slides/pptx/assets/logo-small.png">    </p:cNvPr>
           <p:cNvPicPr>
             <a:picLocks noChangeAspect="1"/>
           </p:cNvPicPr>
@@ -3673,7 +3470,7 @@
         </p:blipFill>
         <p:spPr>
           <a:xfrm>
-            <a:off x="7872984" y="4681728"/>
+            <a:off x="7882128" y="4700016"/>
             <a:ext cx="768096" cy="356616"/>
           </a:xfrm>
           <a:prstGeom prst="rect">
@@ -3695,7 +3492,7 @@
     <p:bg>
       <p:bgPr>
         <a:solidFill>
-          <a:srgbClr val="0E1726"/>
+          <a:srgbClr val="FFFFFF"/>
         </a:solidFill>
       </p:bgPr>
     </p:bg>
@@ -3740,7 +3537,7 @@
             <a:r>
               <a:rPr lang="en-US" sz="4600" b="1" dirty="0">
                 <a:solidFill>
-                  <a:srgbClr val="E6EDF3"/>
+                  <a:srgbClr val="1F2937"/>
                 </a:solidFill>
                 <a:latin typeface="Arial" pitchFamily="34" charset="0"/>
                 <a:ea typeface="Arial" pitchFamily="34" charset="-122"/>
@@ -3791,38 +3588,9 @@
           </a:p>
         </p:txBody>
       </p:sp>
-      <p:sp>
-        <p:nvSpPr>
-          <p:cNvPr id="4" name="Shape 2"/>
-          <p:cNvSpPr/>
-          <p:nvPr/>
-        </p:nvSpPr>
-        <p:spPr>
-          <a:xfrm>
-            <a:off x="7772400" y="4590288"/>
-            <a:ext cx="969264" cy="475488"/>
-          </a:xfrm>
-          <a:prstGeom prst="roundRect">
-            <a:avLst>
-              <a:gd name="adj" fmla="val 11538"/>
-            </a:avLst>
-          </a:prstGeom>
-          <a:solidFill>
-            <a:srgbClr val="FFFFFF"/>
-          </a:solidFill>
-          <a:ln/>
-          <a:effectLst>
-            <a:outerShdw sx="100000" sy="100000" kx="0" ky="0" algn="bl" rotWithShape="0" blurRad="101600" dist="38100" dir="5400000">
-              <a:srgbClr val="000000">
-                <a:alpha val="35000"/>
-              </a:srgbClr>
-            </a:outerShdw>
-          </a:effectLst>
-        </p:spPr>
-      </p:sp>
       <p:pic>
         <p:nvPicPr>
-          <p:cNvPr id="5" name="Image 0" descr="/Users/pop7/Library/CloudStorage/OneDrive-MonsterConnectCo.,Ltd/Lecture/KOSEN69 - software-security/slides/pptx/assets/logo-small.png">    </p:cNvPr>
+          <p:cNvPr id="4" name="Image 0" descr="/Users/pop7/Library/CloudStorage/OneDrive-MonsterConnectCo.,Ltd/Lecture/KOSEN69 - software-security/slides/pptx/assets/logo-small.png">    </p:cNvPr>
           <p:cNvPicPr>
             <a:picLocks noChangeAspect="1"/>
           </p:cNvPicPr>
@@ -3836,7 +3604,7 @@
         </p:blipFill>
         <p:spPr>
           <a:xfrm>
-            <a:off x="7872984" y="4681728"/>
+            <a:off x="7882128" y="4700016"/>
             <a:ext cx="768096" cy="356616"/>
           </a:xfrm>
           <a:prstGeom prst="rect">

--- a/slides/pptx/week16.pptx
+++ b/slides/pptx/week16.pptx
@@ -509,7 +509,7 @@
           <a:p>
             <a:r>
               <a:rPr lang="en-US" dirty="0"/>
-              <a:t/>
+              <a:t>Studio day, not a lecture. Frame: this is the dress rehearsal for the graded Week 19. Goal = every team leaves knowing exactly what to fix. ~2 min.</a:t>
             </a:r>
             <a:endParaRPr lang="en-US" dirty="0"/>
           </a:p>
@@ -597,7 +597,7 @@
           <a:p>
             <a:r>
               <a:rPr lang="en-US" dirty="0"/>
-              <a:t/>
+              <a:t>Roadmap. Time-box: WIP demos + peer review first half, practice CTF second half (300-min block). Keep demos strictly timed so everyone presents.</a:t>
             </a:r>
             <a:endParaRPr lang="en-US" dirty="0"/>
           </a:p>
@@ -685,7 +685,7 @@
           <a:p>
             <a:r>
               <a:rPr lang="en-US" dirty="0"/>
-              <a:t/>
+              <a:t>Show the bar before demos so teams self-assess. This = the Week 19 graded rubric (project/README.md). Emphasize the narrative: attack → root cause → fix is what scores. ~4 min.</a:t>
             </a:r>
             <a:endParaRPr lang="en-US" dirty="0"/>
           </a:p>
@@ -773,7 +773,7 @@
           <a:p>
             <a:r>
               <a:rPr lang="en-US" dirty="0"/>
-              <a:t/>
+              <a:t>Run on a timer (15 min/team). "Ungraded" lowers stakes so they expose weak spots now. Insist on a LIVE walkthrough, not slides about it.</a:t>
             </a:r>
             <a:endParaRPr lang="en-US" dirty="0"/>
           </a:p>
@@ -861,7 +861,7 @@
           <a:p>
             <a:r>
               <a:rPr lang="en-US" dirty="0"/>
-              <a:t/>
+              <a:t>Hand each team this as a checklist to score the team presenting (use scrimmage.md). Peer feedback in writing → the presenting team gets a punch-list. This is the main value of the session.</a:t>
             </a:r>
             <a:endParaRPr lang="en-US" dirty="0"/>
           </a:p>
@@ -949,7 +949,7 @@
           <a:p>
             <a:r>
               <a:rPr lang="en-US" dirty="0"/>
-              <a:t/>
+              <a:t>Run the scrimmage (scrimmage.md / item-bank CTF pool) in the exact W19 team format so the final has no surprises. Leaderboard on CTFd. ~2.5 h.</a:t>
             </a:r>
             <a:endParaRPr lang="en-US" dirty="0"/>
           </a:p>
@@ -1037,7 +1037,7 @@
           <a:p>
             <a:r>
               <a:rPr lang="en-US" dirty="0"/>
-              <a:t/>
+              <a:t>Send them off with a concrete punch-list (the peer feedback). Remind: W19 demo is graded + the final CTF tournament.</a:t>
             </a:r>
             <a:endParaRPr lang="en-US" dirty="0"/>
           </a:p>
@@ -1125,7 +1125,7 @@
           <a:p>
             <a:r>
               <a:rPr lang="en-US" dirty="0"/>
-              <a:t/>
+              <a:t>Bridge to W17 review. Confirm project repos are runnable before the final.</a:t>
             </a:r>
             <a:endParaRPr lang="en-US" dirty="0"/>
           </a:p>
